--- a/経歴紹介 伊藤浩也20260525.pptx
+++ b/経歴紹介 伊藤浩也20260525.pptx
@@ -4488,10 +4488,10 @@
           <a:p>
             <a:pPr algn="l"/>
             <a:r>
-              <a:rPr lang="ja-JP" altLang="en-US" sz="2400">
+              <a:rPr lang="ja-JP" altLang="en-US" sz="2400" dirty="0">
                 <a:ea typeface="游ゴシック"/>
               </a:rPr>
-              <a:t>１．業務経歴①～⑤</a:t>
+              <a:t>１．業務経歴①～⑥</a:t>
             </a:r>
             <a:endParaRPr lang="en-US" altLang="ja-JP" sz="2400" dirty="0"/>
           </a:p>
@@ -10446,12 +10446,12 @@
           <a:lstStyle/>
           <a:p>
             <a:r>
-              <a:rPr lang="ja-JP" altLang="en-US" sz="3600">
+              <a:rPr lang="ja-JP" altLang="en-US" sz="3600" dirty="0">
                 <a:ea typeface="游ゴシック Light"/>
               </a:rPr>
-              <a:t>１．業務経歴⑤</a:t>
-            </a:r>
-            <a:endParaRPr kumimoji="1" lang="ja-JP" altLang="en-US">
+              <a:t>１．業務経歴⑥</a:t>
+            </a:r>
+            <a:endParaRPr kumimoji="1" lang="ja-JP" altLang="en-US" dirty="0">
               <a:ea typeface="游ゴシック Light"/>
             </a:endParaRPr>
           </a:p>
